--- a/slides/16_Presenting_and_Feedback.pptx
+++ b/slides/16_Presenting_and_Feedback.pptx
@@ -128,7 +128,7 @@
   <p:extLst>
     <p:ext uri="{521415D9-36F7-43E2-AB2F-B90AF26B5E84}">
       <p14:sectionLst xmlns:p14="http://schemas.microsoft.com/office/powerpoint/2010/main">
-        <p14:section name="Introduction" id="{36505bf1-bd03-8142-53f2-a142df1f2f25}">
+        <p14:section name="Introduction" id="{e001ea8c-d438-8917-3dc3-da23984639a3}">
           <p14:sldIdLst>
             <p14:sldId id="256"/>
             <p14:sldId id="257"/>
@@ -137,7 +137,7 @@
             <p14:sldId id="260"/>
           </p14:sldIdLst>
         </p14:section>
-        <p14:section name="Planning our talk" id="{a1d5b61b-684a-2c56-5a79-3215b68fb15d}">
+        <p14:section name="Planning our talk" id="{d090a5c1-e9b3-dadb-3bba-ce639cb7fa43}">
           <p14:sldIdLst>
             <p14:sldId id="261"/>
             <p14:sldId id="262"/>
@@ -146,14 +146,14 @@
             <p14:sldId id="265"/>
           </p14:sldIdLst>
         </p14:section>
-        <p14:section name="Rehearsing" id="{6ee0709d-2c2c-b976-18e8-4fe51e650ce5}">
+        <p14:section name="Rehearsing" id="{0d35c2e5-bf54-9308-ee33-fc38e41c2474}">
           <p14:sldIdLst>
             <p14:sldId id="266"/>
             <p14:sldId id="267"/>
             <p14:sldId id="268"/>
           </p14:sldIdLst>
         </p14:section>
-        <p14:section name="Giving feedback" id="{b336f2de-5683-cb84-99c1-4d59c0070340}">
+        <p14:section name="Giving feedback" id="{78e6549c-2017-db3d-8151-b27256fb7782}">
           <p14:sldIdLst>
             <p14:sldId id="269"/>
             <p14:sldId id="270"/>
@@ -161,13 +161,13 @@
             <p14:sldId id="272"/>
           </p14:sldIdLst>
         </p14:section>
-        <p14:section name="Making our final edits" id="{833fb3e0-3a72-0e80-2699-ca698175f1e1}">
+        <p14:section name="Making our final edits" id="{2bb5145f-c183-5aa5-951e-d717678b0b9a}">
           <p14:sldIdLst>
             <p14:sldId id="273"/>
             <p14:sldId id="274"/>
           </p14:sldIdLst>
         </p14:section>
-        <p14:section name="Wrap up" id="{b2460356-6017-2f18-d8cb-9c02a42c6ce6}">
+        <p14:section name="Wrap up" id="{4333c62f-c52b-9f73-4274-373a59b10c4f}">
           <p14:sldIdLst>
             <p14:sldId id="275"/>
             <p14:sldId id="276"/>
@@ -3592,7 +3592,7 @@
               <a:t>Open our story in app view, on the class server or with </a:t>
             </a:r>
             <a:r>
-              <a:rPr lang="en-US" sz="1600" dirty="0">
+              <a:rPr lang="en-US" sz="1600" b="1" dirty="0">
                 <a:solidFill>
                   <a:srgbClr val="E8A55A"/>
                 </a:solidFill>
@@ -4087,7 +4087,7 @@
               <a:t>Before our talk, open our story on the class server and scroll through to the end. If it's slow or shows an empty page, tell our teacher straight away, and present from </a:t>
             </a:r>
             <a:r>
-              <a:rPr lang="en-US" sz="1800" dirty="0">
+              <a:rPr lang="en-US" sz="1800" b="1" dirty="0">
                 <a:solidFill>
                   <a:srgbClr val="B86E1E"/>
                 </a:solidFill>
@@ -6571,7 +6571,7 @@
               <a:t>Under </a:t>
             </a:r>
             <a:r>
-              <a:rPr lang="en-US" sz="1800" dirty="0">
+              <a:rPr lang="en-US" sz="1800" b="1" dirty="0">
                 <a:solidFill>
                   <a:srgbClr val="B86E1E"/>
                 </a:solidFill>
@@ -6676,7 +6676,7 @@
               <a:t>, check with </a:t>
             </a:r>
             <a:r>
-              <a:rPr lang="en-US" sz="1800" dirty="0">
+              <a:rPr lang="en-US" sz="1800" b="1" dirty="0">
                 <a:solidFill>
                   <a:srgbClr val="B86E1E"/>
                 </a:solidFill>
@@ -10557,7 +10557,7 @@
               <a:t>Under a new heading </a:t>
             </a:r>
             <a:r>
-              <a:rPr lang="en-US" sz="1400" dirty="0">
+              <a:rPr lang="en-US" sz="1400" b="1" dirty="0">
                 <a:solidFill>
                   <a:srgbClr val="B86E1E"/>
                 </a:solidFill>
